--- a/examples/ppt169_china_telecom_2025/exports/china_telecom_2025_native_charts_tables.pptx
+++ b/examples/ppt169_china_telecom_2025/exports/china_telecom_2025_native_charts_tables.pptx
@@ -1837,7 +1837,7 @@
           </a:lstStyle>
           <a:p>
             <a:pPr algn="l"/>
-            <a:fld id="{A7872AFA-8112-4A60-8B4C-C144C4907B00}" type="datetimeFigureOut">
+            <a:fld id="{8724D9EC-D39B-415F-8584-C319F88278E1}" type="datetimeFigureOut">
               <a:rPr lang="zh-CN" sz="1120" dirty="0">
                 <a:solidFill>
                   <a:srgbClr val="6B7280"/>
@@ -1855,7 +1855,7 @@
     </p:spTree>
     <p:extLst>
       <p:ext uri="{BB962C8B-B14F-4D97-AF65-F5344CB8AC3E}">
-        <p14:creationId val="850802884"/>
+        <p14:creationId val="214853716"/>
       </p:ext>
     </p:extLst>
   </p:cSld>
@@ -2838,7 +2838,7 @@
           </a:lstStyle>
           <a:p>
             <a:pPr algn="r"/>
-            <a:fld id="{21483614-C642-4C19-BDB9-B5743D5903AD}" type="slidenum">
+            <a:fld id="{11136C1D-8016-438D-ACAB-23A18EB4FBBF}" type="slidenum">
               <a:rPr lang="en-US" sz="980" dirty="0">
                 <a:solidFill>
                   <a:srgbClr val="6B7280"/>
@@ -2856,7 +2856,7 @@
     </p:spTree>
     <p:extLst>
       <p:ext uri="{BB962C8B-B14F-4D97-AF65-F5344CB8AC3E}">
-        <p14:creationId val="2362380700"/>
+        <p14:creationId val="2921113927"/>
       </p:ext>
     </p:extLst>
   </p:cSld>
@@ -3302,7 +3302,7 @@
     </p:spTree>
     <p:extLst>
       <p:ext uri="{BB962C8B-B14F-4D97-AF65-F5344CB8AC3E}">
-        <p14:creationId val="2511495652"/>
+        <p14:creationId val="546843573"/>
       </p:ext>
     </p:extLst>
   </p:cSld>
@@ -3638,7 +3638,7 @@
           </a:lstStyle>
           <a:p>
             <a:pPr algn="r"/>
-            <a:fld id="{2807C16D-E33A-441D-A214-8DA19CC8A577}" type="slidenum">
+            <a:fld id="{1CFE99AE-6ECD-44E2-99BC-597727FE3AC9}" type="slidenum">
               <a:rPr lang="en-US" sz="980" dirty="0">
                 <a:solidFill>
                   <a:srgbClr val="6B7280"/>
@@ -3656,7 +3656,7 @@
     </p:spTree>
     <p:extLst>
       <p:ext uri="{BB962C8B-B14F-4D97-AF65-F5344CB8AC3E}">
-        <p14:creationId val="375605801"/>
+        <p14:creationId val="200165461"/>
       </p:ext>
     </p:extLst>
   </p:cSld>
@@ -4017,7 +4017,7 @@
           </a:lstStyle>
           <a:p>
             <a:pPr algn="r"/>
-            <a:fld id="{90EB75B6-C8F2-40C1-B0B6-94D61202C42E}" type="slidenum">
+            <a:fld id="{1FCDD37A-4135-4424-85C2-0F7D728F24E6}" type="slidenum">
               <a:rPr lang="en-US" sz="980" dirty="0">
                 <a:solidFill>
                   <a:srgbClr val="FFFFFF"/>
@@ -4035,7 +4035,7 @@
     </p:spTree>
     <p:extLst>
       <p:ext uri="{BB962C8B-B14F-4D97-AF65-F5344CB8AC3E}">
-        <p14:creationId val="454473497"/>
+        <p14:creationId val="3283843474"/>
       </p:ext>
     </p:extLst>
   </p:cSld>
@@ -4582,7 +4582,7 @@
     </p:spTree>
     <p:extLst>
       <p:ext uri="{BB962C8B-B14F-4D97-AF65-F5344CB8AC3E}">
-        <p14:creationId val="1952014063"/>
+        <p14:creationId val="482026951"/>
       </p:ext>
     </p:extLst>
   </p:cSld>
@@ -7213,7 +7213,7 @@
           <a:lstStyle/>
           <a:p>
             <a:pPr algn="r"/>
-            <a:fld id="{5DFF0FE0-234A-47D3-B224-767CD6F706AD}" type="slidenum">
+            <a:fld id="{2B28BA3A-9E40-443E-B445-7CAAB18AB129}" type="slidenum">
               <a:rPr lang="en-US" sz="980" dirty="0">
                 <a:solidFill>
                   <a:srgbClr val="6B7280"/>
@@ -9780,7 +9780,7 @@
           <a:lstStyle/>
           <a:p>
             <a:pPr algn="r"/>
-            <a:fld id="{5DFF0FE0-234A-47D3-B224-767CD6F706AD}" type="slidenum">
+            <a:fld id="{2B28BA3A-9E40-443E-B445-7CAAB18AB129}" type="slidenum">
               <a:rPr lang="en-US" sz="980" dirty="0">
                 <a:solidFill>
                   <a:srgbClr val="6B7280"/>
@@ -11194,7 +11194,7 @@
           <a:lstStyle/>
           <a:p>
             <a:pPr algn="r"/>
-            <a:fld id="{5DFF0FE0-234A-47D3-B224-767CD6F706AD}" type="slidenum">
+            <a:fld id="{2B28BA3A-9E40-443E-B445-7CAAB18AB129}" type="slidenum">
               <a:rPr lang="en-US" sz="980" dirty="0">
                 <a:solidFill>
                   <a:srgbClr val="6B7280"/>
@@ -11612,7 +11612,7 @@
           <a:lstStyle/>
           <a:p>
             <a:pPr algn="r"/>
-            <a:fld id="{5DFF0FE0-234A-47D3-B224-767CD6F706AD}" type="slidenum">
+            <a:fld id="{2B28BA3A-9E40-443E-B445-7CAAB18AB129}" type="slidenum">
               <a:rPr lang="en-US" sz="980" dirty="0">
                 <a:solidFill>
                   <a:srgbClr val="FFFFFF"/>
